--- a/08-Kubernetes/session2/08-02-Self-Managed-Kubernetes.pptx
+++ b/08-Kubernetes/session2/08-02-Self-Managed-Kubernetes.pptx
@@ -2395,7 +2395,29 @@
                 <a:ea typeface="Arial" pitchFamily="34" charset="-122"/>
                 <a:cs typeface="Arial" pitchFamily="34" charset="-120"/>
               </a:rPr>
-              <a:t>All nodes: Ubuntu 20.04 + Docker + kubectl</a:t>
+              <a:t>All nodes: Ubuntu 24 + </a:t>
+            </a:r>
+            <a:r>
+              <a:rPr lang="en-US" sz="1200" dirty="0" err="1">
+                <a:solidFill>
+                  <a:srgbClr val="3A4668"/>
+                </a:solidFill>
+                <a:latin typeface="Arial" pitchFamily="34" charset="0"/>
+                <a:ea typeface="Arial" pitchFamily="34" charset="-122"/>
+                <a:cs typeface="Arial" pitchFamily="34" charset="-120"/>
+              </a:rPr>
+              <a:t>Containerd</a:t>
+            </a:r>
+            <a:r>
+              <a:rPr lang="en-US" sz="1200" dirty="0">
+                <a:solidFill>
+                  <a:srgbClr val="3A4668"/>
+                </a:solidFill>
+                <a:latin typeface="Arial" pitchFamily="34" charset="0"/>
+                <a:ea typeface="Arial" pitchFamily="34" charset="-122"/>
+                <a:cs typeface="Arial" pitchFamily="34" charset="-120"/>
+              </a:rPr>
+              <a:t> + kubectl</a:t>
             </a:r>
             <a:endParaRPr lang="en-US" sz="1200" dirty="0"/>
           </a:p>
@@ -2511,7 +2533,7 @@
                 <a:ea typeface="Arial" pitchFamily="34" charset="-122"/>
                 <a:cs typeface="Arial" pitchFamily="34" charset="-120"/>
               </a:rPr>
-              <a:t>CNI Plugin (Cilium): Pod-to-pod networking across nodes</a:t>
+              <a:t>CNI (Container Networking Interface) Plugin (Cilium): Pod-to-pod networking across nodes</a:t>
             </a:r>
             <a:endParaRPr lang="en-US" sz="1100" dirty="0"/>
           </a:p>
@@ -4496,7 +4518,7 @@
         </p:blipFill>
         <p:spPr>
           <a:xfrm>
-            <a:off x="3977640" y="365760"/>
+            <a:off x="3977640" y="906780"/>
             <a:ext cx="1188720" cy="1188720"/>
           </a:xfrm>
           <a:prstGeom prst="rect">
@@ -4512,7 +4534,7 @@
         </p:nvSpPr>
         <p:spPr>
           <a:xfrm>
-            <a:off x="457200" y="1828800"/>
+            <a:off x="457200" y="2369820"/>
             <a:ext cx="8229600" cy="731520"/>
           </a:xfrm>
           <a:prstGeom prst="rect">
